--- a/MLBasic/34 - Practice - Исследование зависимостей/Presentation/Practice - AB test.pptx
+++ b/MLBasic/34 - Practice - Исследование зависимостей/Presentation/Practice - AB test.pptx
@@ -4112,7 +4112,7 @@
           <a:p>
             <a:fld id="{1D8BD707-D9CF-40AE-B4C6-C98DA3205C09}" type="datetimeFigureOut">
               <a:rPr lang="en-US"/>
-              <a:t>9/5/24</a:t>
+              <a:t>4/15/25</a:t>
             </a:fld>
             <a:endParaRPr lang="en-US"/>
           </a:p>
@@ -4295,7 +4295,7 @@
           <a:p>
             <a:fld id="{1D8BD707-D9CF-40AE-B4C6-C98DA3205C09}" type="datetimeFigureOut">
               <a:rPr lang="en-US"/>
-              <a:t>9/5/24</a:t>
+              <a:t>4/15/25</a:t>
             </a:fld>
             <a:endParaRPr lang="en-US"/>
           </a:p>
@@ -7168,8 +7168,8 @@
           </a:p>
         </p:txBody>
       </p:sp>
-      <mc:AlternateContent xmlns:mc="http://schemas.openxmlformats.org/markup-compatibility/2006">
-        <mc:Choice xmlns:a14="http://schemas.microsoft.com/office/drawing/2010/main" Requires="a14">
+      <mc:AlternateContent xmlns:mc="http://schemas.openxmlformats.org/markup-compatibility/2006" xmlns:a14="http://schemas.microsoft.com/office/drawing/2010/main">
+        <mc:Choice Requires="a14">
           <p:sp>
             <p:nvSpPr>
               <p:cNvPr id="3" name="TextBox 2">
@@ -7308,6 +7308,7 @@
                 </a:endParaRPr>
               </a:p>
               <a:p>
+                <a:pPr/>
                 <a14:m>
                   <m:oMathPara xmlns:m="http://schemas.openxmlformats.org/officeDocument/2006/math">
                     <m:oMathParaPr>
@@ -7920,7 +7921,7 @@
             </p:txBody>
           </p:sp>
         </mc:Choice>
-        <mc:Fallback>
+        <mc:Fallback xmlns="">
           <p:sp>
             <p:nvSpPr>
               <p:cNvPr id="3" name="TextBox 2">
@@ -8557,7 +8558,7 @@
         <p:spPr>
           <a:xfrm>
             <a:off x="1915425" y="1558024"/>
-            <a:ext cx="6156900" cy="800189"/>
+            <a:ext cx="6156900" cy="492412"/>
           </a:xfrm>
           <a:prstGeom prst="rect">
             <a:avLst/>
@@ -8581,26 +8582,7 @@
                 <a:latin typeface="Roboto"/>
                 <a:ea typeface="Roboto"/>
               </a:rPr>
-              <a:t>Практика: Исследование зависимостей и </a:t>
-            </a:r>
-            <a:br>
-              <a:rPr lang="ru-RU" sz="2000" dirty="0">
-                <a:solidFill>
-                  <a:schemeClr val="tx1"/>
-                </a:solidFill>
-                <a:latin typeface="Roboto"/>
-                <a:ea typeface="Roboto"/>
-              </a:rPr>
-            </a:br>
-            <a:r>
-              <a:rPr lang="ru-RU" sz="2000" dirty="0">
-                <a:solidFill>
-                  <a:schemeClr val="tx1"/>
-                </a:solidFill>
-                <a:latin typeface="Roboto"/>
-                <a:ea typeface="Roboto"/>
-              </a:rPr>
-              <a:t>А/Б тесты</a:t>
+              <a:t>Введение в машинное обучение</a:t>
             </a:r>
             <a:endParaRPr sz="2000" dirty="0">
               <a:solidFill>
